--- a/examples/pipeline.pptx
+++ b/examples/pipeline.pptx
@@ -7,7 +7,7 @@
   <p:sldIdLst>
     <p:sldId id="256" r:id="rId7"/>
   </p:sldIdLst>
-  <p:sldSz cx="3591917" cy="2091690" type="screen4x3"/>
+  <p:sldSz cx="2951837" cy="1451610" type="screen4x3"/>
   <p:notesSz cx="6858000" cy="9144000"/>
   <p:defaultTextStyle>
     <a:defPPr>
@@ -3096,7 +3096,7 @@
         </p:nvCxnSpPr>
         <p:spPr>
           <a:xfrm>
-            <a:off x="457200" y="671512"/>
+            <a:off x="137160" y="351472"/>
             <a:ext cx="914400" cy="0"/>
           </a:xfrm>
           <a:prstGeom prst="line">
@@ -3133,7 +3133,7 @@
         </p:nvSpPr>
         <p:spPr>
           <a:xfrm>
-            <a:off x="594360" y="514350"/>
+            <a:off x="274320" y="194310"/>
             <a:ext cx="640080" cy="131445"/>
           </a:xfrm>
           <a:prstGeom prst="rect">
@@ -3168,7 +3168,7 @@
         </p:nvSpPr>
         <p:spPr>
           <a:xfrm>
-            <a:off x="674370" y="697230"/>
+            <a:off x="354330" y="377190"/>
             <a:ext cx="480059" cy="131445"/>
           </a:xfrm>
           <a:prstGeom prst="rect">
@@ -3203,7 +3203,7 @@
         </p:nvSpPr>
         <p:spPr>
           <a:xfrm>
-            <a:off x="1371600" y="457200"/>
+            <a:off x="1051560" y="137160"/>
             <a:ext cx="848717" cy="428625"/>
           </a:xfrm>
           <a:prstGeom prst="roundRect">
@@ -3281,7 +3281,7 @@
         </p:nvCxnSpPr>
         <p:spPr>
           <a:xfrm>
-            <a:off x="2220317" y="671512"/>
+            <a:off x="1900277" y="351472"/>
             <a:ext cx="914400" cy="0"/>
           </a:xfrm>
           <a:prstGeom prst="line">
@@ -3318,7 +3318,7 @@
         </p:nvSpPr>
         <p:spPr>
           <a:xfrm>
-            <a:off x="2357477" y="514350"/>
+            <a:off x="2037437" y="194310"/>
             <a:ext cx="640080" cy="131445"/>
           </a:xfrm>
           <a:prstGeom prst="rect">
@@ -3353,8 +3353,8 @@
         </p:nvSpPr>
         <p:spPr>
           <a:xfrm>
-            <a:off x="2437487" y="697230"/>
-            <a:ext cx="480059" cy="131445"/>
+            <a:off x="2117447" y="377190"/>
+            <a:ext cx="480060" cy="131445"/>
           </a:xfrm>
           <a:prstGeom prst="rect">
             <a:avLst/>
@@ -3388,7 +3388,7 @@
         </p:nvCxnSpPr>
         <p:spPr>
           <a:xfrm>
-            <a:off x="1795958" y="885825"/>
+            <a:off x="1475918" y="565785"/>
             <a:ext cx="0" cy="320040"/>
           </a:xfrm>
           <a:prstGeom prst="line">
@@ -3425,7 +3425,7 @@
         </p:nvSpPr>
         <p:spPr>
           <a:xfrm>
-            <a:off x="1485007" y="1205865"/>
+            <a:off x="1164967" y="885825"/>
             <a:ext cx="621903" cy="428625"/>
           </a:xfrm>
           <a:prstGeom prst="roundRect">
